--- a/incidenti_datascience_intermedia.pptx
+++ b/incidenti_datascience_intermedia.pptx
@@ -1579,7 +1579,7 @@
                   </a:schemeClr>
                 </a:solidFill>
               </a:rPr>
-              <a:t>Cantone Basilea Città - opendata.swiss</a:t>
+              <a:t>Cantone Basilea Città - opendata.swiss – MeteoSwiss</a:t>
             </a:r>
           </a:p>
         </p:txBody>
@@ -3196,6 +3196,36 @@
           </a:p>
         </p:txBody>
       </p:sp>
+      <p:pic>
+        <p:nvPicPr>
+          <p:cNvPr id="5" name="Immagine 4">
+            <a:extLst>
+              <a:ext uri="{FF2B5EF4-FFF2-40B4-BE49-F238E27FC236}">
+                <a16:creationId xmlns:a16="http://schemas.microsoft.com/office/drawing/2014/main" id="{48833B2D-BDE2-3CED-3FD8-A6835B50CEF7}"/>
+              </a:ext>
+            </a:extLst>
+          </p:cNvPr>
+          <p:cNvPicPr>
+            <a:picLocks noChangeAspect="1"/>
+          </p:cNvPicPr>
+          <p:nvPr/>
+        </p:nvPicPr>
+        <p:blipFill>
+          <a:blip r:embed="rId3"/>
+          <a:stretch>
+            <a:fillRect/>
+          </a:stretch>
+        </p:blipFill>
+        <p:spPr>
+          <a:xfrm>
+            <a:off x="160565" y="981339"/>
+            <a:ext cx="8822870" cy="3898477"/>
+          </a:xfrm>
+          <a:prstGeom prst="rect">
+            <a:avLst/>
+          </a:prstGeom>
+        </p:spPr>
+      </p:pic>
     </p:spTree>
     <p:extLst>
       <p:ext uri="{BB962C8B-B14F-4D97-AF65-F5344CB8AC3E}">

--- a/incidenti_datascience_intermedia.pptx
+++ b/incidenti_datascience_intermedia.pptx
@@ -391,6 +391,136 @@
           <a:bodyPr/>
           <a:lstStyle/>
           <a:p>
+            <a:r>
+              <a:rPr lang="en-US" dirty="0" err="1"/>
+              <a:t>migliora</a:t>
+            </a:r>
+            <a:r>
+              <a:rPr lang="en-US" dirty="0"/>
+              <a:t> il bin </a:t>
+            </a:r>
+            <a:r>
+              <a:rPr lang="en-US" dirty="0" err="1"/>
+              <a:t>orario</a:t>
+            </a:r>
+            <a:r>
+              <a:rPr lang="en-US" dirty="0"/>
+              <a:t>,</a:t>
+            </a:r>
+          </a:p>
+          <a:p>
+            <a:r>
+              <a:rPr lang="en-US" dirty="0"/>
+              <a:t>cambia </a:t>
+            </a:r>
+            <a:r>
+              <a:rPr lang="en-US" dirty="0" err="1"/>
+              <a:t>ordine</a:t>
+            </a:r>
+            <a:r>
+              <a:rPr lang="en-US" dirty="0"/>
+              <a:t> </a:t>
+            </a:r>
+            <a:r>
+              <a:rPr lang="en-US" dirty="0" err="1"/>
+              <a:t>giorni</a:t>
+            </a:r>
+            <a:r>
+              <a:rPr lang="en-US" dirty="0"/>
+              <a:t> </a:t>
+            </a:r>
+            <a:r>
+              <a:rPr lang="en-US" dirty="0" err="1"/>
+              <a:t>lunedi-domenica</a:t>
+            </a:r>
+            <a:r>
+              <a:rPr lang="en-US" dirty="0"/>
+              <a:t> al </a:t>
+            </a:r>
+            <a:r>
+              <a:rPr lang="en-US" dirty="0" err="1"/>
+              <a:t>contrario</a:t>
+            </a:r>
+            <a:r>
+              <a:rPr lang="en-US" dirty="0"/>
+              <a:t>! - cambia lingua</a:t>
+            </a:r>
+            <a:br>
+              <a:rPr lang="en-US" dirty="0"/>
+            </a:br>
+            <a:br>
+              <a:rPr lang="en-US" dirty="0"/>
+            </a:br>
+            <a:r>
+              <a:rPr lang="en-US" dirty="0" err="1"/>
+              <a:t>facciamo</a:t>
+            </a:r>
+            <a:r>
+              <a:rPr lang="en-US" dirty="0"/>
+              <a:t> un </a:t>
+            </a:r>
+            <a:r>
+              <a:rPr lang="en-US" dirty="0" err="1"/>
+              <a:t>controllo</a:t>
+            </a:r>
+            <a:r>
+              <a:rPr lang="en-US" dirty="0"/>
+              <a:t> </a:t>
+            </a:r>
+            <a:r>
+              <a:rPr lang="en-US" dirty="0" err="1"/>
+              <a:t>incidenti</a:t>
+            </a:r>
+            <a:r>
+              <a:rPr lang="en-US" dirty="0"/>
+              <a:t> 260 ogni </a:t>
+            </a:r>
+            <a:r>
+              <a:rPr lang="en-US" dirty="0" err="1"/>
+              <a:t>quanto</a:t>
+            </a:r>
+            <a:r>
+              <a:rPr lang="en-US" dirty="0"/>
+              <a:t> </a:t>
+            </a:r>
+            <a:r>
+              <a:rPr lang="en-US" dirty="0" err="1"/>
+              <a:t>giorno</a:t>
+            </a:r>
+            <a:r>
+              <a:rPr lang="en-US" dirty="0"/>
+              <a:t>?? mese??</a:t>
+            </a:r>
+            <a:br>
+              <a:rPr lang="en-US" dirty="0"/>
+            </a:br>
+            <a:br>
+              <a:rPr lang="en-US" dirty="0"/>
+            </a:br>
+            <a:r>
+              <a:rPr lang="en-US" dirty="0"/>
+              <a:t>heatmap solo </a:t>
+            </a:r>
+            <a:r>
+              <a:rPr lang="en-US" dirty="0" err="1"/>
+              <a:t>incidenti</a:t>
+            </a:r>
+            <a:r>
+              <a:rPr lang="en-US" dirty="0"/>
+              <a:t> molto </a:t>
+            </a:r>
+            <a:r>
+              <a:rPr lang="en-US" dirty="0" err="1"/>
+              <a:t>gravi</a:t>
+            </a:r>
+            <a:r>
+              <a:rPr lang="en-US" dirty="0"/>
+              <a:t> o </a:t>
+            </a:r>
+            <a:r>
+              <a:rPr lang="en-US" dirty="0" err="1"/>
+              <a:t>mortali</a:t>
+            </a:r>
             <a:endParaRPr lang="en-US" dirty="0"/>
           </a:p>
         </p:txBody>
@@ -607,6 +737,102 @@
           <a:bodyPr/>
           <a:lstStyle/>
           <a:p>
+            <a:r>
+              <a:rPr lang="en-US" dirty="0"/>
+              <a:t>Fare </a:t>
+            </a:r>
+            <a:r>
+              <a:rPr lang="en-US" dirty="0" err="1"/>
+              <a:t>più</a:t>
+            </a:r>
+            <a:r>
+              <a:rPr lang="en-US" dirty="0"/>
+              <a:t> </a:t>
+            </a:r>
+            <a:r>
+              <a:rPr lang="en-US" dirty="0" err="1"/>
+              <a:t>piccoli</a:t>
+            </a:r>
+            <a:r>
+              <a:rPr lang="en-US" dirty="0"/>
+              <a:t> solo </a:t>
+            </a:r>
+            <a:r>
+              <a:rPr lang="en-US" dirty="0" err="1"/>
+              <a:t>danni</a:t>
+            </a:r>
+            <a:r>
+              <a:rPr lang="en-US" dirty="0"/>
+              <a:t> </a:t>
+            </a:r>
+            <a:r>
+              <a:rPr lang="en-US" dirty="0" err="1"/>
+              <a:t>materiali</a:t>
+            </a:r>
+            <a:r>
+              <a:rPr lang="en-US" dirty="0"/>
+              <a:t>. </a:t>
+            </a:r>
+            <a:r>
+              <a:rPr lang="en-US" dirty="0" err="1"/>
+              <a:t>devono</a:t>
+            </a:r>
+            <a:r>
+              <a:rPr lang="en-US" dirty="0"/>
+              <a:t> </a:t>
+            </a:r>
+            <a:r>
+              <a:rPr lang="en-US" dirty="0" err="1"/>
+              <a:t>risaltare</a:t>
+            </a:r>
+            <a:r>
+              <a:rPr lang="en-US" dirty="0"/>
+              <a:t> </a:t>
+            </a:r>
+            <a:r>
+              <a:rPr lang="en-US" dirty="0" err="1"/>
+              <a:t>quelli</a:t>
+            </a:r>
+            <a:r>
+              <a:rPr lang="en-US" dirty="0"/>
+              <a:t> </a:t>
+            </a:r>
+            <a:r>
+              <a:rPr lang="en-US" dirty="0" err="1"/>
+              <a:t>importanti</a:t>
+            </a:r>
+            <a:r>
+              <a:rPr lang="en-US" dirty="0"/>
+              <a:t>, </a:t>
+            </a:r>
+            <a:r>
+              <a:rPr lang="en-US" dirty="0" err="1"/>
+              <a:t>modifica</a:t>
+            </a:r>
+            <a:r>
+              <a:rPr lang="en-US" dirty="0"/>
+              <a:t> grandezza con </a:t>
+            </a:r>
+            <a:r>
+              <a:rPr lang="en-US" dirty="0" err="1"/>
+              <a:t>dimensione</a:t>
+            </a:r>
+            <a:r>
+              <a:rPr lang="en-US" dirty="0"/>
+              <a:t>, </a:t>
+            </a:r>
+            <a:r>
+              <a:rPr lang="en-US" dirty="0" err="1"/>
+              <a:t>aggiungi</a:t>
+            </a:r>
+            <a:r>
+              <a:rPr lang="en-US" dirty="0"/>
+              <a:t> video per fare </a:t>
+            </a:r>
+            <a:r>
+              <a:rPr lang="en-US" dirty="0" err="1"/>
+              <a:t>vedere</a:t>
+            </a:r>
             <a:endParaRPr lang="en-US" dirty="0"/>
           </a:p>
         </p:txBody>
@@ -715,7 +941,176 @@
           <a:bodyPr/>
           <a:lstStyle/>
           <a:p>
+            <a:r>
+              <a:rPr lang="en-US" dirty="0"/>
+              <a:t>Far </a:t>
+            </a:r>
+            <a:r>
+              <a:rPr lang="en-US" dirty="0" err="1"/>
+              <a:t>notare</a:t>
+            </a:r>
+            <a:r>
+              <a:rPr lang="en-US" dirty="0"/>
+              <a:t> </a:t>
+            </a:r>
+            <a:r>
+              <a:rPr lang="en-US" dirty="0" err="1"/>
+              <a:t>che</a:t>
+            </a:r>
+            <a:r>
+              <a:rPr lang="en-US" dirty="0"/>
+              <a:t> la </a:t>
+            </a:r>
+            <a:r>
+              <a:rPr lang="en-US" dirty="0" err="1"/>
+              <a:t>strada</a:t>
+            </a:r>
+            <a:r>
+              <a:rPr lang="en-US" dirty="0"/>
+              <a:t> </a:t>
+            </a:r>
+            <a:r>
+              <a:rPr lang="en-US" dirty="0" err="1"/>
+              <a:t>principale</a:t>
+            </a:r>
+            <a:r>
+              <a:rPr lang="en-US" dirty="0"/>
+              <a:t> in </a:t>
+            </a:r>
+            <a:r>
+              <a:rPr lang="en-US" dirty="0" err="1"/>
+              <a:t>percentuale</a:t>
+            </a:r>
+            <a:r>
+              <a:rPr lang="en-US" dirty="0"/>
+              <a:t> ha </a:t>
+            </a:r>
+            <a:r>
+              <a:rPr lang="en-US" dirty="0" err="1"/>
+              <a:t>più</a:t>
+            </a:r>
+            <a:r>
+              <a:rPr lang="en-US" dirty="0"/>
+              <a:t> </a:t>
+            </a:r>
+            <a:r>
+              <a:rPr lang="en-US" dirty="0" err="1"/>
+              <a:t>morti</a:t>
+            </a:r>
+            <a:r>
+              <a:rPr lang="en-US" dirty="0"/>
+              <a:t> rispetto alla </a:t>
+            </a:r>
+            <a:r>
+              <a:rPr lang="en-US" dirty="0" err="1"/>
+              <a:t>secondaria</a:t>
+            </a:r>
+            <a:r>
+              <a:rPr lang="en-US" dirty="0"/>
+              <a:t>.</a:t>
+            </a:r>
+          </a:p>
+          <a:p>
             <a:endParaRPr lang="en-US" dirty="0"/>
+          </a:p>
+          <a:p>
+            <a:r>
+              <a:rPr lang="en-US" dirty="0"/>
+              <a:t>Fai 2 plot in uno </a:t>
+            </a:r>
+            <a:r>
+              <a:rPr lang="en-US" dirty="0" err="1"/>
+              <a:t>comparazione</a:t>
+            </a:r>
+            <a:r>
+              <a:rPr lang="en-US" dirty="0"/>
+              <a:t>, uno </a:t>
+            </a:r>
+            <a:r>
+              <a:rPr lang="en-US" dirty="0" err="1"/>
+              <a:t>così</a:t>
+            </a:r>
+            <a:r>
+              <a:rPr lang="en-US" dirty="0"/>
+              <a:t> e uno in </a:t>
+            </a:r>
+            <a:r>
+              <a:rPr lang="en-US" dirty="0" err="1"/>
+              <a:t>percentiale</a:t>
+            </a:r>
+            <a:r>
+              <a:rPr lang="en-US" dirty="0"/>
+              <a:t> a far </a:t>
+            </a:r>
+            <a:r>
+              <a:rPr lang="en-US" dirty="0" err="1"/>
+              <a:t>vedere</a:t>
+            </a:r>
+            <a:r>
+              <a:rPr lang="en-US" dirty="0"/>
+              <a:t> la </a:t>
+            </a:r>
+            <a:r>
+              <a:rPr lang="en-US" dirty="0" err="1"/>
+              <a:t>differenza</a:t>
+            </a:r>
+            <a:r>
+              <a:rPr lang="en-US" dirty="0"/>
+              <a:t> per ogni </a:t>
+            </a:r>
+            <a:r>
+              <a:rPr lang="en-US" dirty="0" err="1"/>
+              <a:t>categoria</a:t>
+            </a:r>
+            <a:r>
+              <a:rPr lang="en-US" dirty="0"/>
+              <a:t>.</a:t>
+            </a:r>
+            <a:br>
+              <a:rPr lang="en-US" dirty="0"/>
+            </a:br>
+            <a:r>
+              <a:rPr lang="en-US" dirty="0" err="1"/>
+              <a:t>una</a:t>
+            </a:r>
+            <a:r>
+              <a:rPr lang="en-US" dirty="0"/>
+              <a:t> barra da 0 - 100 per ogni divisa in 4 parti per far </a:t>
+            </a:r>
+            <a:r>
+              <a:rPr lang="en-US" dirty="0" err="1"/>
+              <a:t>vedere</a:t>
+            </a:r>
+            <a:r>
+              <a:rPr lang="en-US" dirty="0"/>
+              <a:t> la vera </a:t>
+            </a:r>
+            <a:r>
+              <a:rPr lang="en-US" dirty="0" err="1"/>
+              <a:t>differenza</a:t>
+            </a:r>
+            <a:br>
+              <a:rPr lang="en-US" dirty="0"/>
+            </a:br>
+            <a:br>
+              <a:rPr lang="en-US" dirty="0"/>
+            </a:br>
+            <a:r>
+              <a:rPr lang="en-US" dirty="0" err="1"/>
+              <a:t>incidenti</a:t>
+            </a:r>
+            <a:r>
+              <a:rPr lang="en-US" dirty="0"/>
+              <a:t> sempre tutti </a:t>
+            </a:r>
+            <a:r>
+              <a:rPr lang="en-US" dirty="0" err="1"/>
+              <a:t>all'anno</a:t>
+            </a:r>
+            <a:r>
+              <a:rPr lang="en-US" dirty="0"/>
+              <a:t>!!!</a:t>
+            </a:r>
           </a:p>
         </p:txBody>
       </p:sp>
@@ -823,6 +1218,51 @@
           <a:bodyPr/>
           <a:lstStyle/>
           <a:p>
+            <a:r>
+              <a:rPr lang="en-US" dirty="0" err="1"/>
+              <a:t>possiamo</a:t>
+            </a:r>
+            <a:r>
+              <a:rPr lang="en-US" dirty="0"/>
+              <a:t> fare la </a:t>
+            </a:r>
+            <a:r>
+              <a:rPr lang="en-US" dirty="0" err="1"/>
+              <a:t>stessa</a:t>
+            </a:r>
+            <a:r>
+              <a:rPr lang="en-US" dirty="0"/>
+              <a:t> </a:t>
+            </a:r>
+            <a:r>
+              <a:rPr lang="en-US" dirty="0" err="1"/>
+              <a:t>cosa</a:t>
+            </a:r>
+            <a:r>
+              <a:rPr lang="en-US" dirty="0"/>
+              <a:t> della slide </a:t>
+            </a:r>
+            <a:r>
+              <a:rPr lang="en-US" dirty="0" err="1"/>
+              <a:t>precedente</a:t>
+            </a:r>
+            <a:r>
+              <a:rPr lang="en-US" dirty="0"/>
+              <a:t>.</a:t>
+            </a:r>
+          </a:p>
+          <a:p>
+            <a:endParaRPr lang="en-US" dirty="0"/>
+          </a:p>
+          <a:p>
+            <a:r>
+              <a:rPr lang="en-US" dirty="0"/>
+              <a:t>cambia </a:t>
+            </a:r>
+            <a:r>
+              <a:rPr lang="en-US" dirty="0" err="1"/>
+              <a:t>indice</a:t>
+            </a:r>
             <a:endParaRPr lang="en-US" dirty="0"/>
           </a:p>
         </p:txBody>
@@ -931,6 +1371,18 @@
           <a:bodyPr/>
           <a:lstStyle/>
           <a:p>
+            <a:r>
+              <a:rPr lang="en-US" dirty="0" err="1"/>
+              <a:t>Uguale</a:t>
+            </a:r>
+            <a:r>
+              <a:rPr lang="en-US" dirty="0"/>
+              <a:t> a quelle di </a:t>
+            </a:r>
+            <a:r>
+              <a:rPr lang="en-US" dirty="0" err="1"/>
+              <a:t>priuma</a:t>
+            </a:r>
             <a:endParaRPr lang="en-US" dirty="0"/>
           </a:p>
         </p:txBody>
@@ -1039,6 +1491,36 @@
           <a:bodyPr/>
           <a:lstStyle/>
           <a:p>
+            <a:r>
+              <a:rPr lang="en-US" dirty="0" err="1"/>
+              <a:t>Rimuovi</a:t>
+            </a:r>
+            <a:br>
+              <a:rPr lang="en-US" dirty="0"/>
+            </a:br>
+            <a:br>
+              <a:rPr lang="en-US" dirty="0"/>
+            </a:br>
+            <a:r>
+              <a:rPr lang="en-US" dirty="0" err="1"/>
+              <a:t>magari</a:t>
+            </a:r>
+            <a:r>
+              <a:rPr lang="en-US" dirty="0"/>
+              <a:t> </a:t>
+            </a:r>
+            <a:r>
+              <a:rPr lang="en-US" dirty="0" err="1"/>
+              <a:t>qualcosa</a:t>
+            </a:r>
+            <a:r>
+              <a:rPr lang="en-US" dirty="0"/>
+              <a:t> di </a:t>
+            </a:r>
+            <a:r>
+              <a:rPr lang="en-US" dirty="0" err="1"/>
+              <a:t>creativo</a:t>
+            </a:r>
             <a:endParaRPr lang="en-US" dirty="0"/>
           </a:p>
         </p:txBody>
